--- a/mecha-ia/docs/soutenance.pptx
+++ b/mecha-ia/docs/soutenance.pptx
@@ -15116,27 +15116,6 @@
                 <a:cs typeface="IBM Plex Sans" pitchFamily="34" charset="-120"/>
               </a:rPr>
               <a:t>Minimisation : les matricules n’entrent jamais dans le modèle</a:t>
-            </a:r>
-            <a:endParaRPr lang="en-US" sz="1300" dirty="0"/>
-          </a:p>
-          <a:p>
-            <a:pPr algn="l" marL="168656" indent="-168656">
-              <a:lnSpc>
-                <a:spcPts val="1885"/>
-              </a:lnSpc>
-              <a:buSzPct val="100000"/>
-              <a:buChar char="•"/>
-            </a:pPr>
-            <a:r>
-              <a:rPr lang="en-US" sz="1300" dirty="0">
-                <a:solidFill>
-                  <a:srgbClr val="3B4556"/>
-                </a:solidFill>
-                <a:latin typeface="IBM Plex Sans" pitchFamily="34" charset="0"/>
-                <a:ea typeface="IBM Plex Sans" pitchFamily="34" charset="-122"/>
-                <a:cs typeface="IBM Plex Sans" pitchFamily="34" charset="-120"/>
-              </a:rPr>
-              <a:t>Pseudonymisation SHA-256 salée avant tout usage analytique</a:t>
             </a:r>
             <a:endParaRPr lang="en-US" sz="1300" dirty="0"/>
           </a:p>
